--- a/民意與調查Week2.pptx
+++ b/民意與調查Week2.pptx
@@ -11249,8 +11249,8 @@
           </a:p>
         </p:txBody>
       </p:sp>
-      <mc:AlternateContent xmlns:mc="http://schemas.openxmlformats.org/markup-compatibility/2006">
-        <mc:Choice xmlns:a14="http://schemas.microsoft.com/office/drawing/2010/main" Requires="a14">
+      <mc:AlternateContent xmlns:mc="http://schemas.openxmlformats.org/markup-compatibility/2006" xmlns:a14="http://schemas.microsoft.com/office/drawing/2010/main">
+        <mc:Choice Requires="a14">
           <p:sp>
             <p:nvSpPr>
               <p:cNvPr id="14339" name="Rectangle 3">
@@ -11814,7 +11814,7 @@
             </p:txBody>
           </p:sp>
         </mc:Choice>
-        <mc:Fallback>
+        <mc:Fallback xmlns="">
           <p:sp>
             <p:nvSpPr>
               <p:cNvPr id="14339" name="Rectangle 3">
@@ -12519,8 +12519,8 @@
           </a:p>
         </p:txBody>
       </p:sp>
-      <mc:AlternateContent xmlns:mc="http://schemas.openxmlformats.org/markup-compatibility/2006">
-        <mc:Choice xmlns:a14="http://schemas.microsoft.com/office/drawing/2010/main" Requires="a14">
+      <mc:AlternateContent xmlns:mc="http://schemas.openxmlformats.org/markup-compatibility/2006" xmlns:a14="http://schemas.microsoft.com/office/drawing/2010/main">
+        <mc:Choice Requires="a14">
           <p:sp>
             <p:nvSpPr>
               <p:cNvPr id="14339" name="Rectangle 3">
@@ -12960,7 +12960,7 @@
             </p:txBody>
           </p:sp>
         </mc:Choice>
-        <mc:Fallback>
+        <mc:Fallback xmlns="">
           <p:sp>
             <p:nvSpPr>
               <p:cNvPr id="14339" name="Rectangle 3">
@@ -14915,27 +14915,90 @@
                 </a:pPr>
                 <a:r>
                   <a:rPr lang="en-US" altLang="zh-TW" sz="2000" dirty="0"/>
-                  <a:t>Between-person effect — </a:t>
+                  <a:t>Between-person effect </a:t>
                 </a:r>
                 <a:r>
                   <a:rPr lang="zh-TW" altLang="en-US" sz="2000" dirty="0"/>
-                  <a:t>個人與所有人之間的平均差異</a:t>
+                  <a:t>：</a:t>
                 </a:r>
                 <a:r>
                   <a:rPr lang="en-US" altLang="zh-TW" sz="2000" dirty="0"/>
-                  <a:t>X</a:t>
+                  <a:t> </a:t>
                 </a:r>
                 <a:r>
                   <a:rPr lang="zh-TW" altLang="en-US" sz="2000" dirty="0"/>
-                  <a:t>同時在</a:t>
+                  <a:t>用Ｘ的平均值</a:t>
+                </a:r>
+                <a14:m>
+                  <m:oMath xmlns:m="http://schemas.openxmlformats.org/officeDocument/2006/math">
+                    <m:sSub>
+                      <m:sSubPr>
+                        <m:ctrlPr>
+                          <a:rPr lang="en-US" altLang="zh-TW" sz="2000" i="1" smtClean="0">
+                            <a:latin typeface="Cambria Math" panose="02040503050406030204" pitchFamily="18" charset="0"/>
+                          </a:rPr>
+                        </m:ctrlPr>
+                      </m:sSubPr>
+                      <m:e>
+                        <m:acc>
+                          <m:accPr>
+                            <m:chr m:val="̅"/>
+                            <m:ctrlPr>
+                              <a:rPr lang="en-US" altLang="zh-TW" sz="2000" i="1" smtClean="0">
+                                <a:latin typeface="Cambria Math" panose="02040503050406030204" pitchFamily="18" charset="0"/>
+                              </a:rPr>
+                            </m:ctrlPr>
+                          </m:accPr>
+                          <m:e>
+                            <m:r>
+                              <a:rPr lang="en-US" altLang="zh-TW" sz="2000" b="0" i="1" smtClean="0">
+                                <a:latin typeface="Cambria Math" panose="02040503050406030204" pitchFamily="18" charset="0"/>
+                              </a:rPr>
+                              <m:t>𝑋</m:t>
+                            </m:r>
+                          </m:e>
+                        </m:acc>
+                      </m:e>
+                      <m:sub>
+                        <m:r>
+                          <a:rPr lang="en-US" altLang="zh-TW" sz="2000" b="0" i="1" smtClean="0">
+                            <a:latin typeface="Cambria Math" panose="02040503050406030204" pitchFamily="18" charset="0"/>
+                          </a:rPr>
+                          <m:t>𝑖</m:t>
+                        </m:r>
+                      </m:sub>
+                    </m:sSub>
+                  </m:oMath>
+                </a14:m>
+                <a:r>
+                  <a:rPr lang="zh-TW" altLang="en-US" sz="2000" dirty="0"/>
+                  <a:t>表示。代表個體在</a:t>
                 </a:r>
                 <a:r>
-                  <a:rPr lang="en-US" altLang="zh-TW" sz="2000" dirty="0"/>
-                  <a:t>Y</a:t>
+                  <a:rPr lang="zh-TW" altLang="en-US" sz="2000" b="1" dirty="0"/>
+                  <a:t>特定時間點</a:t>
                 </a:r>
                 <a:r>
                   <a:rPr lang="zh-TW" altLang="en-US" sz="2000" dirty="0"/>
-                  <a:t>的差異。</a:t>
+                  <a:t>的數值與其自身平均值的「偏離程度」。</a:t>
+                </a:r>
+                <a:endParaRPr lang="en-US" altLang="zh-TW" sz="2000" dirty="0"/>
+              </a:p>
+              <a:p>
+                <a:pPr eaLnBrk="1" hangingPunct="1">
+                  <a:lnSpc>
+                    <a:spcPct val="150000"/>
+                  </a:lnSpc>
+                  <a:buFont typeface="Arial" panose="020B0604020202020204" pitchFamily="34" charset="0"/>
+                  <a:buChar char="•"/>
+                </a:pPr>
+                <a:r>
+                  <a:rPr lang="en-US" altLang="zh-TW" sz="2000" dirty="0"/>
+                  <a:t>Within-person effect </a:t>
+                </a:r>
+                <a:r>
+                  <a:rPr lang="zh-TW" altLang="en-US" sz="2000" dirty="0"/>
+                  <a:t>： </a:t>
                 </a:r>
                 <a14:m>
                   <m:oMath xmlns:m="http://schemas.openxmlformats.org/officeDocument/2006/math">
@@ -15009,8 +15072,445 @@
                     </m:sSub>
                   </m:oMath>
                 </a14:m>
+                <a:r>
+                  <a:rPr lang="zh-TW" altLang="en-US" sz="2000" dirty="0"/>
+                  <a:t>。因為</a:t>
+                </a:r>
+                <a14:m>
+                  <m:oMath xmlns:m="http://schemas.openxmlformats.org/officeDocument/2006/math">
+                    <m:sSub>
+                      <m:sSubPr>
+                        <m:ctrlPr>
+                          <a:rPr lang="en-US" altLang="zh-TW" sz="2000" i="1" smtClean="0">
+                            <a:latin typeface="Cambria Math" panose="02040503050406030204" pitchFamily="18" charset="0"/>
+                          </a:rPr>
+                        </m:ctrlPr>
+                      </m:sSubPr>
+                      <m:e>
+                        <m:acc>
+                          <m:accPr>
+                            <m:chr m:val="̅"/>
+                            <m:ctrlPr>
+                              <a:rPr lang="en-US" altLang="zh-TW" sz="2000" i="1" smtClean="0">
+                                <a:latin typeface="Cambria Math" panose="02040503050406030204" pitchFamily="18" charset="0"/>
+                              </a:rPr>
+                            </m:ctrlPr>
+                          </m:accPr>
+                          <m:e>
+                            <m:r>
+                              <a:rPr lang="en-US" altLang="zh-TW" sz="2000" b="0" i="1" smtClean="0">
+                                <a:latin typeface="Cambria Math" panose="02040503050406030204" pitchFamily="18" charset="0"/>
+                              </a:rPr>
+                              <m:t>𝑋</m:t>
+                            </m:r>
+                          </m:e>
+                        </m:acc>
+                      </m:e>
+                      <m:sub>
+                        <m:r>
+                          <a:rPr lang="en-US" altLang="zh-TW" sz="2000" b="0" i="1" smtClean="0">
+                            <a:latin typeface="Cambria Math" panose="02040503050406030204" pitchFamily="18" charset="0"/>
+                          </a:rPr>
+                          <m:t>𝑖</m:t>
+                        </m:r>
+                      </m:sub>
+                    </m:sSub>
+                  </m:oMath>
+                </a14:m>
+                <a:r>
+                  <a:rPr lang="zh-TW" altLang="en-US" sz="2000" dirty="0"/>
+                  <a:t>是所有時間綜合的平均值，</a:t>
+                </a:r>
+                <a:r>
+                  <a:rPr lang="en-US" altLang="zh-TW" sz="2000" dirty="0"/>
+                  <a:t> </a:t>
+                </a:r>
+                <a14:m>
+                  <m:oMath xmlns:m="http://schemas.openxmlformats.org/officeDocument/2006/math">
+                    <m:sSub>
+                      <m:sSubPr>
+                        <m:ctrlPr>
+                          <a:rPr lang="en-US" altLang="zh-TW" sz="2000" i="1">
+                            <a:latin typeface="Cambria Math" panose="02040503050406030204" pitchFamily="18" charset="0"/>
+                          </a:rPr>
+                        </m:ctrlPr>
+                      </m:sSubPr>
+                      <m:e>
+                        <m:r>
+                          <a:rPr lang="en-US" altLang="zh-TW" sz="2000" i="1">
+                            <a:latin typeface="Cambria Math" panose="02040503050406030204" pitchFamily="18" charset="0"/>
+                          </a:rPr>
+                          <m:t>𝑋</m:t>
+                        </m:r>
+                      </m:e>
+                      <m:sub>
+                        <m:r>
+                          <a:rPr lang="en-US" altLang="zh-TW" sz="2000" i="1">
+                            <a:latin typeface="Cambria Math" panose="02040503050406030204" pitchFamily="18" charset="0"/>
+                          </a:rPr>
+                          <m:t>𝑖𝑡</m:t>
+                        </m:r>
+                      </m:sub>
+                    </m:sSub>
+                    <m:r>
+                      <a:rPr lang="en-US" altLang="zh-TW" sz="2000" i="1">
+                        <a:latin typeface="Cambria Math" panose="02040503050406030204" pitchFamily="18" charset="0"/>
+                      </a:rPr>
+                      <m:t>−</m:t>
+                    </m:r>
+                    <m:sSub>
+                      <m:sSubPr>
+                        <m:ctrlPr>
+                          <a:rPr lang="en-US" altLang="zh-TW" sz="2000" i="1">
+                            <a:latin typeface="Cambria Math" panose="02040503050406030204" pitchFamily="18" charset="0"/>
+                          </a:rPr>
+                        </m:ctrlPr>
+                      </m:sSubPr>
+                      <m:e>
+                        <m:acc>
+                          <m:accPr>
+                            <m:chr m:val="̅"/>
+                            <m:ctrlPr>
+                              <a:rPr lang="en-US" altLang="zh-TW" sz="2000" i="1">
+                                <a:latin typeface="Cambria Math" panose="02040503050406030204" pitchFamily="18" charset="0"/>
+                              </a:rPr>
+                            </m:ctrlPr>
+                          </m:accPr>
+                          <m:e>
+                            <m:r>
+                              <a:rPr lang="en-US" altLang="zh-TW" sz="2000" i="1">
+                                <a:latin typeface="Cambria Math" panose="02040503050406030204" pitchFamily="18" charset="0"/>
+                              </a:rPr>
+                              <m:t>𝑋</m:t>
+                            </m:r>
+                          </m:e>
+                        </m:acc>
+                      </m:e>
+                      <m:sub>
+                        <m:r>
+                          <a:rPr lang="en-US" altLang="zh-TW" sz="2000" i="1">
+                            <a:latin typeface="Cambria Math" panose="02040503050406030204" pitchFamily="18" charset="0"/>
+                          </a:rPr>
+                          <m:t>𝑖</m:t>
+                        </m:r>
+                      </m:sub>
+                    </m:sSub>
+                    <m:r>
+                      <a:rPr lang="en-US" altLang="zh-TW" sz="2000" b="0" i="0" smtClean="0">
+                        <a:latin typeface="Cambria Math" panose="02040503050406030204" pitchFamily="18" charset="0"/>
+                      </a:rPr>
+                      <m:t> </m:t>
+                    </m:r>
+                  </m:oMath>
+                </a14:m>
+                <a:r>
+                  <a:rPr lang="zh-TW" altLang="en-US" sz="2000" dirty="0"/>
+                  <a:t>代表個體在</a:t>
+                </a:r>
+                <a:r>
+                  <a:rPr lang="zh-TW" altLang="en-US" sz="2000" b="1" dirty="0"/>
+                  <a:t>特定時間點</a:t>
+                </a:r>
+                <a:r>
+                  <a:rPr lang="zh-TW" altLang="en-US" sz="2000" dirty="0"/>
+                  <a:t>的數值與其自身平均值的「偏離程度」。</a:t>
+                </a:r>
                 <a:endParaRPr lang="en-US" altLang="zh-TW" sz="2000" dirty="0"/>
               </a:p>
+              <a:p>
+                <a:pPr eaLnBrk="1" hangingPunct="1"/>
+                <a:endParaRPr lang="en-US" altLang="zh-TW" dirty="0"/>
+              </a:p>
+            </p:txBody>
+          </p:sp>
+        </mc:Choice>
+        <mc:Fallback>
+          <p:sp>
+            <p:nvSpPr>
+              <p:cNvPr id="15363" name="Rectangle 3">
+                <a:extLst>
+                  <a:ext uri="{FF2B5EF4-FFF2-40B4-BE49-F238E27FC236}">
+                    <a16:creationId xmlns:a16="http://schemas.microsoft.com/office/drawing/2014/main" id="{6CB01DE3-D0B7-BCF1-47CE-4246E19CDB08}"/>
+                  </a:ext>
+                </a:extLst>
+              </p:cNvPr>
+              <p:cNvSpPr>
+                <a:spLocks noGrp="1" noRot="1" noChangeAspect="1" noMove="1" noResize="1" noEditPoints="1" noAdjustHandles="1" noChangeArrowheads="1" noChangeShapeType="1" noTextEdit="1"/>
+              </p:cNvSpPr>
+              <p:nvPr>
+                <p:ph type="body" idx="1"/>
+              </p:nvPr>
+            </p:nvSpPr>
+            <p:spPr>
+              <a:blipFill>
+                <a:blip r:embed="rId2"/>
+                <a:stretch>
+                  <a:fillRect l="-309" b="-977"/>
+                </a:stretch>
+              </a:blipFill>
+            </p:spPr>
+            <p:txBody>
+              <a:bodyPr/>
+              <a:lstStyle/>
+              <a:p>
+                <a:r>
+                  <a:rPr lang="zh-TW" altLang="en-US">
+                    <a:noFill/>
+                  </a:rPr>
+                  <a:t> </a:t>
+                </a:r>
+              </a:p>
+            </p:txBody>
+          </p:sp>
+        </mc:Fallback>
+      </mc:AlternateContent>
+    </p:spTree>
+  </p:cSld>
+  <p:clrMapOvr>
+    <a:masterClrMapping/>
+  </p:clrMapOvr>
+</p:sld>
+</file>
+
+<file path=ppt/slides/slide25.xml><?xml version="1.0" encoding="utf-8"?>
+<p:sld xmlns:a="http://schemas.openxmlformats.org/drawingml/2006/main" xmlns:r="http://schemas.openxmlformats.org/officeDocument/2006/relationships" xmlns:p="http://schemas.openxmlformats.org/presentationml/2006/main">
+  <p:cSld>
+    <p:spTree>
+      <p:nvGrpSpPr>
+        <p:cNvPr id="1" name=""/>
+        <p:cNvGrpSpPr/>
+        <p:nvPr/>
+      </p:nvGrpSpPr>
+      <p:grpSpPr>
+        <a:xfrm>
+          <a:off x="0" y="0"/>
+          <a:ext cx="0" cy="0"/>
+          <a:chOff x="0" y="0"/>
+          <a:chExt cx="0" cy="0"/>
+        </a:xfrm>
+      </p:grpSpPr>
+      <p:sp>
+        <p:nvSpPr>
+          <p:cNvPr id="15361" name="投影片編號版面配置區 4">
+            <a:extLst>
+              <a:ext uri="{FF2B5EF4-FFF2-40B4-BE49-F238E27FC236}">
+                <a16:creationId xmlns:a16="http://schemas.microsoft.com/office/drawing/2014/main" id="{693269D5-7F3A-92AC-92BF-6DE38525EAEA}"/>
+              </a:ext>
+            </a:extLst>
+          </p:cNvPr>
+          <p:cNvSpPr>
+            <a:spLocks noGrp="1"/>
+          </p:cNvSpPr>
+          <p:nvPr>
+            <p:ph type="sldNum" sz="quarter" idx="11"/>
+          </p:nvPr>
+        </p:nvSpPr>
+        <p:spPr>
+          <a:noFill/>
+          <a:extLst>
+            <a:ext uri="{909E8E84-426E-40DD-AFC4-6F175D3DCCD1}">
+              <a14:hiddenFill xmlns:a14="http://schemas.microsoft.com/office/drawing/2010/main">
+                <a:solidFill>
+                  <a:schemeClr val="accent1"/>
+                </a:solidFill>
+              </a14:hiddenFill>
+            </a:ext>
+            <a:ext uri="{91240B29-F687-4F45-9708-019B960494DF}">
+              <a14:hiddenLine xmlns:a14="http://schemas.microsoft.com/office/drawing/2010/main" w="9525">
+                <a:solidFill>
+                  <a:schemeClr val="tx1"/>
+                </a:solidFill>
+                <a:miter lim="800000"/>
+                <a:headEnd/>
+                <a:tailEnd/>
+              </a14:hiddenLine>
+            </a:ext>
+            <a:ext uri="{AF507438-7753-43E0-B8FC-AC1667EBCBE1}">
+              <a14:hiddenEffects xmlns:a14="http://schemas.microsoft.com/office/drawing/2010/main">
+                <a:effectLst>
+                  <a:outerShdw dist="35921" dir="2700000" algn="ctr" rotWithShape="0">
+                    <a:schemeClr val="bg2"/>
+                  </a:outerShdw>
+                </a:effectLst>
+              </a14:hiddenEffects>
+            </a:ext>
+          </a:extLst>
+        </p:spPr>
+        <p:txBody>
+          <a:bodyPr/>
+          <a:lstStyle>
+            <a:lvl1pPr>
+              <a:defRPr kumimoji="1">
+                <a:solidFill>
+                  <a:schemeClr val="tx1"/>
+                </a:solidFill>
+                <a:latin typeface="Arial" panose="020B0604020202020204" pitchFamily="34" charset="0"/>
+                <a:ea typeface="新細明體" panose="02020500000000000000" pitchFamily="18" charset="-120"/>
+              </a:defRPr>
+            </a:lvl1pPr>
+            <a:lvl2pPr marL="742950" indent="-285750">
+              <a:defRPr kumimoji="1">
+                <a:solidFill>
+                  <a:schemeClr val="tx1"/>
+                </a:solidFill>
+                <a:latin typeface="Arial" panose="020B0604020202020204" pitchFamily="34" charset="0"/>
+                <a:ea typeface="新細明體" panose="02020500000000000000" pitchFamily="18" charset="-120"/>
+              </a:defRPr>
+            </a:lvl2pPr>
+            <a:lvl3pPr marL="1143000" indent="-228600">
+              <a:defRPr kumimoji="1">
+                <a:solidFill>
+                  <a:schemeClr val="tx1"/>
+                </a:solidFill>
+                <a:latin typeface="Arial" panose="020B0604020202020204" pitchFamily="34" charset="0"/>
+                <a:ea typeface="新細明體" panose="02020500000000000000" pitchFamily="18" charset="-120"/>
+              </a:defRPr>
+            </a:lvl3pPr>
+            <a:lvl4pPr marL="1600200" indent="-228600">
+              <a:defRPr kumimoji="1">
+                <a:solidFill>
+                  <a:schemeClr val="tx1"/>
+                </a:solidFill>
+                <a:latin typeface="Arial" panose="020B0604020202020204" pitchFamily="34" charset="0"/>
+                <a:ea typeface="新細明體" panose="02020500000000000000" pitchFamily="18" charset="-120"/>
+              </a:defRPr>
+            </a:lvl4pPr>
+            <a:lvl5pPr marL="2057400" indent="-228600">
+              <a:defRPr kumimoji="1">
+                <a:solidFill>
+                  <a:schemeClr val="tx1"/>
+                </a:solidFill>
+                <a:latin typeface="Arial" panose="020B0604020202020204" pitchFamily="34" charset="0"/>
+                <a:ea typeface="新細明體" panose="02020500000000000000" pitchFamily="18" charset="-120"/>
+              </a:defRPr>
+            </a:lvl5pPr>
+            <a:lvl6pPr marL="2514600" indent="-228600" eaLnBrk="0" fontAlgn="base" hangingPunct="0">
+              <a:spcBef>
+                <a:spcPct val="0"/>
+              </a:spcBef>
+              <a:spcAft>
+                <a:spcPct val="0"/>
+              </a:spcAft>
+              <a:defRPr kumimoji="1">
+                <a:solidFill>
+                  <a:schemeClr val="tx1"/>
+                </a:solidFill>
+                <a:latin typeface="Arial" panose="020B0604020202020204" pitchFamily="34" charset="0"/>
+                <a:ea typeface="新細明體" panose="02020500000000000000" pitchFamily="18" charset="-120"/>
+              </a:defRPr>
+            </a:lvl6pPr>
+            <a:lvl7pPr marL="2971800" indent="-228600" eaLnBrk="0" fontAlgn="base" hangingPunct="0">
+              <a:spcBef>
+                <a:spcPct val="0"/>
+              </a:spcBef>
+              <a:spcAft>
+                <a:spcPct val="0"/>
+              </a:spcAft>
+              <a:defRPr kumimoji="1">
+                <a:solidFill>
+                  <a:schemeClr val="tx1"/>
+                </a:solidFill>
+                <a:latin typeface="Arial" panose="020B0604020202020204" pitchFamily="34" charset="0"/>
+                <a:ea typeface="新細明體" panose="02020500000000000000" pitchFamily="18" charset="-120"/>
+              </a:defRPr>
+            </a:lvl7pPr>
+            <a:lvl8pPr marL="3429000" indent="-228600" eaLnBrk="0" fontAlgn="base" hangingPunct="0">
+              <a:spcBef>
+                <a:spcPct val="0"/>
+              </a:spcBef>
+              <a:spcAft>
+                <a:spcPct val="0"/>
+              </a:spcAft>
+              <a:defRPr kumimoji="1">
+                <a:solidFill>
+                  <a:schemeClr val="tx1"/>
+                </a:solidFill>
+                <a:latin typeface="Arial" panose="020B0604020202020204" pitchFamily="34" charset="0"/>
+                <a:ea typeface="新細明體" panose="02020500000000000000" pitchFamily="18" charset="-120"/>
+              </a:defRPr>
+            </a:lvl8pPr>
+            <a:lvl9pPr marL="3886200" indent="-228600" eaLnBrk="0" fontAlgn="base" hangingPunct="0">
+              <a:spcBef>
+                <a:spcPct val="0"/>
+              </a:spcBef>
+              <a:spcAft>
+                <a:spcPct val="0"/>
+              </a:spcAft>
+              <a:defRPr kumimoji="1">
+                <a:solidFill>
+                  <a:schemeClr val="tx1"/>
+                </a:solidFill>
+                <a:latin typeface="Arial" panose="020B0604020202020204" pitchFamily="34" charset="0"/>
+                <a:ea typeface="新細明體" panose="02020500000000000000" pitchFamily="18" charset="-120"/>
+              </a:defRPr>
+            </a:lvl9pPr>
+          </a:lstStyle>
+          <a:p>
+            <a:fld id="{EBE02C60-DB4E-114A-953C-5EAFB3A2DC91}" type="slidenum">
+              <a:rPr kumimoji="0" lang="en-US" altLang="zh-TW">
+                <a:latin typeface="Arial Black" panose="020B0604020202020204" pitchFamily="34" charset="0"/>
+              </a:rPr>
+              <a:pPr/>
+              <a:t>25</a:t>
+            </a:fld>
+            <a:endParaRPr kumimoji="0" lang="en-US" altLang="zh-TW">
+              <a:latin typeface="Arial Black" panose="020B0604020202020204" pitchFamily="34" charset="0"/>
+            </a:endParaRPr>
+          </a:p>
+        </p:txBody>
+      </p:sp>
+      <p:sp>
+        <p:nvSpPr>
+          <p:cNvPr id="15362" name="Rectangle 2">
+            <a:extLst>
+              <a:ext uri="{FF2B5EF4-FFF2-40B4-BE49-F238E27FC236}">
+                <a16:creationId xmlns:a16="http://schemas.microsoft.com/office/drawing/2014/main" id="{11687A1C-67C9-CD9B-4357-7D170CE6EEAD}"/>
+              </a:ext>
+            </a:extLst>
+          </p:cNvPr>
+          <p:cNvSpPr>
+            <a:spLocks noGrp="1" noChangeArrowheads="1"/>
+          </p:cNvSpPr>
+          <p:nvPr>
+            <p:ph type="title"/>
+          </p:nvPr>
+        </p:nvSpPr>
+        <p:spPr/>
+        <p:txBody>
+          <a:bodyPr/>
+          <a:lstStyle/>
+          <a:p>
+            <a:pPr eaLnBrk="1" hangingPunct="1"/>
+            <a:r>
+              <a:rPr lang="en-US" altLang="zh-TW" sz="3600" dirty="0"/>
+              <a:t>Within-Between Model(2)</a:t>
+            </a:r>
+            <a:endParaRPr lang="zh-TW" altLang="en-US" sz="3600" dirty="0"/>
+          </a:p>
+        </p:txBody>
+      </p:sp>
+      <mc:AlternateContent xmlns:mc="http://schemas.openxmlformats.org/markup-compatibility/2006">
+        <mc:Choice xmlns:a14="http://schemas.microsoft.com/office/drawing/2010/main" Requires="a14">
+          <p:sp>
+            <p:nvSpPr>
+              <p:cNvPr id="15363" name="Rectangle 3">
+                <a:extLst>
+                  <a:ext uri="{FF2B5EF4-FFF2-40B4-BE49-F238E27FC236}">
+                    <a16:creationId xmlns:a16="http://schemas.microsoft.com/office/drawing/2014/main" id="{6CB01DE3-D0B7-BCF1-47CE-4246E19CDB08}"/>
+                  </a:ext>
+                </a:extLst>
+              </p:cNvPr>
+              <p:cNvSpPr>
+                <a:spLocks noGrp="1" noChangeArrowheads="1"/>
+              </p:cNvSpPr>
+              <p:nvPr>
+                <p:ph type="body" idx="1"/>
+              </p:nvPr>
+            </p:nvSpPr>
+            <p:spPr/>
+            <p:txBody>
+              <a:bodyPr/>
+              <a:lstStyle/>
               <a:p>
                 <a:pPr eaLnBrk="1" hangingPunct="1">
                   <a:lnSpc>
@@ -15020,36 +15520,8 @@
                   <a:buChar char="•"/>
                 </a:pPr>
                 <a:r>
-                  <a:rPr lang="en-US" altLang="zh-TW" sz="2000" dirty="0"/>
-                  <a:t>Within-person effect —</a:t>
-                </a:r>
-                <a:r>
                   <a:rPr lang="zh-TW" altLang="en-US" sz="2000" dirty="0"/>
-                  <a:t> 個人前後的</a:t>
-                </a:r>
-                <a:r>
-                  <a:rPr lang="en-US" altLang="zh-TW" sz="2000" dirty="0"/>
-                  <a:t>X</a:t>
-                </a:r>
-                <a:r>
-                  <a:rPr lang="zh-TW" altLang="en-US" sz="2000" dirty="0"/>
-                  <a:t>差異同時在</a:t>
-                </a:r>
-                <a:r>
-                  <a:rPr lang="en-US" altLang="zh-TW" sz="2000" dirty="0"/>
-                  <a:t>Y</a:t>
-                </a:r>
-                <a:r>
-                  <a:rPr lang="zh-TW" altLang="en-US" sz="2000" dirty="0"/>
-                  <a:t>的差異</a:t>
-                </a:r>
-                <a:r>
-                  <a:rPr lang="en-US" altLang="zh-TW" sz="2000" dirty="0"/>
-                  <a:t>Y</a:t>
-                </a:r>
-                <a:r>
-                  <a:rPr lang="zh-TW" altLang="en-US" sz="2000" dirty="0"/>
-                  <a:t>。模型：</a:t>
+                  <a:t>模型：</a:t>
                 </a:r>
                 <a:endParaRPr lang="en-US" altLang="zh-TW" sz="2000" dirty="0"/>
               </a:p>
@@ -15368,6 +15840,46 @@
                   <a:buFont typeface="Arial" panose="020B0604020202020204" pitchFamily="34" charset="0"/>
                   <a:buChar char="•"/>
                 </a:pPr>
+                <a:r>
+                  <a:rPr lang="en-US" altLang="zh-TW" sz="2000" dirty="0"/>
+                  <a:t>Tsai and Tsai (2022)</a:t>
+                </a:r>
+                <a:r>
+                  <a:rPr lang="zh-TW" altLang="en-US" sz="2000" dirty="0"/>
+                  <a:t>利用</a:t>
+                </a:r>
+                <a:r>
+                  <a:rPr lang="en-US" altLang="zh-TW" sz="2000" dirty="0"/>
+                  <a:t>Within-between</a:t>
+                </a:r>
+                <a:r>
+                  <a:rPr lang="zh-TW" altLang="en-US" sz="2000" dirty="0"/>
+                  <a:t>模型分析兩波追蹤資料，發現認為經濟改善的民眾變得更支持獨立，認同蔡英文總統處理兩岸關係的民眾也變得更支持獨立。此外，政黨認同一直穩定影響統獨立場。</a:t>
+                </a:r>
+                <a:endParaRPr lang="en-US" altLang="zh-TW" sz="2000" dirty="0"/>
+              </a:p>
+              <a:p>
+                <a:pPr eaLnBrk="1" hangingPunct="1">
+                  <a:lnSpc>
+                    <a:spcPct val="150000"/>
+                  </a:lnSpc>
+                  <a:buFont typeface="Arial" panose="020B0604020202020204" pitchFamily="34" charset="0"/>
+                  <a:buChar char="•"/>
+                </a:pPr>
+                <a:r>
+                  <a:rPr lang="zh-TW" altLang="en-US" sz="2000" dirty="0"/>
+                  <a:t>追蹤樣本過程中，難免會損失樣本，所以重點放在解釋樣本本身在兩個時間點之間的態度變化所造成的依變項的變化，而不是推論民眾的意見。前提是民眾常改變意見是隨機發生還是有原因的發生。</a:t>
+                </a:r>
+                <a:endParaRPr lang="en-US" altLang="zh-TW" sz="2000" dirty="0"/>
+              </a:p>
+              <a:p>
+                <a:pPr eaLnBrk="1" hangingPunct="1">
+                  <a:lnSpc>
+                    <a:spcPct val="150000"/>
+                  </a:lnSpc>
+                  <a:buFont typeface="Arial" panose="020B0604020202020204" pitchFamily="34" charset="0"/>
+                  <a:buChar char="•"/>
+                </a:pPr>
                 <a:endParaRPr lang="en-US" altLang="zh-TW" sz="2000" dirty="0"/>
               </a:p>
               <a:p>
@@ -15398,7 +15910,7 @@
               <a:blipFill>
                 <a:blip r:embed="rId2"/>
                 <a:stretch>
-                  <a:fillRect l="-309"/>
+                  <a:fillRect l="-309" r="-2932" b="-977"/>
                 </a:stretch>
               </a:blipFill>
             </p:spPr>
@@ -15407,7 +15919,7 @@
               <a:lstStyle/>
               <a:p>
                 <a:r>
-                  <a:rPr lang="en-US">
+                  <a:rPr lang="zh-TW" altLang="en-US">
                     <a:noFill/>
                   </a:rPr>
                   <a:t> </a:t>
@@ -15417,307 +15929,6 @@
           </p:sp>
         </mc:Fallback>
       </mc:AlternateContent>
-    </p:spTree>
-  </p:cSld>
-  <p:clrMapOvr>
-    <a:masterClrMapping/>
-  </p:clrMapOvr>
-</p:sld>
-</file>
-
-<file path=ppt/slides/slide25.xml><?xml version="1.0" encoding="utf-8"?>
-<p:sld xmlns:a="http://schemas.openxmlformats.org/drawingml/2006/main" xmlns:r="http://schemas.openxmlformats.org/officeDocument/2006/relationships" xmlns:p="http://schemas.openxmlformats.org/presentationml/2006/main">
-  <p:cSld>
-    <p:spTree>
-      <p:nvGrpSpPr>
-        <p:cNvPr id="1" name=""/>
-        <p:cNvGrpSpPr/>
-        <p:nvPr/>
-      </p:nvGrpSpPr>
-      <p:grpSpPr>
-        <a:xfrm>
-          <a:off x="0" y="0"/>
-          <a:ext cx="0" cy="0"/>
-          <a:chOff x="0" y="0"/>
-          <a:chExt cx="0" cy="0"/>
-        </a:xfrm>
-      </p:grpSpPr>
-      <p:sp>
-        <p:nvSpPr>
-          <p:cNvPr id="15361" name="投影片編號版面配置區 4">
-            <a:extLst>
-              <a:ext uri="{FF2B5EF4-FFF2-40B4-BE49-F238E27FC236}">
-                <a16:creationId xmlns:a16="http://schemas.microsoft.com/office/drawing/2014/main" id="{693269D5-7F3A-92AC-92BF-6DE38525EAEA}"/>
-              </a:ext>
-            </a:extLst>
-          </p:cNvPr>
-          <p:cNvSpPr>
-            <a:spLocks noGrp="1"/>
-          </p:cNvSpPr>
-          <p:nvPr>
-            <p:ph type="sldNum" sz="quarter" idx="11"/>
-          </p:nvPr>
-        </p:nvSpPr>
-        <p:spPr>
-          <a:noFill/>
-          <a:extLst>
-            <a:ext uri="{909E8E84-426E-40DD-AFC4-6F175D3DCCD1}">
-              <a14:hiddenFill xmlns:a14="http://schemas.microsoft.com/office/drawing/2010/main">
-                <a:solidFill>
-                  <a:schemeClr val="accent1"/>
-                </a:solidFill>
-              </a14:hiddenFill>
-            </a:ext>
-            <a:ext uri="{91240B29-F687-4F45-9708-019B960494DF}">
-              <a14:hiddenLine xmlns:a14="http://schemas.microsoft.com/office/drawing/2010/main" w="9525">
-                <a:solidFill>
-                  <a:schemeClr val="tx1"/>
-                </a:solidFill>
-                <a:miter lim="800000"/>
-                <a:headEnd/>
-                <a:tailEnd/>
-              </a14:hiddenLine>
-            </a:ext>
-            <a:ext uri="{AF507438-7753-43E0-B8FC-AC1667EBCBE1}">
-              <a14:hiddenEffects xmlns:a14="http://schemas.microsoft.com/office/drawing/2010/main">
-                <a:effectLst>
-                  <a:outerShdw dist="35921" dir="2700000" algn="ctr" rotWithShape="0">
-                    <a:schemeClr val="bg2"/>
-                  </a:outerShdw>
-                </a:effectLst>
-              </a14:hiddenEffects>
-            </a:ext>
-          </a:extLst>
-        </p:spPr>
-        <p:txBody>
-          <a:bodyPr/>
-          <a:lstStyle>
-            <a:lvl1pPr>
-              <a:defRPr kumimoji="1">
-                <a:solidFill>
-                  <a:schemeClr val="tx1"/>
-                </a:solidFill>
-                <a:latin typeface="Arial" panose="020B0604020202020204" pitchFamily="34" charset="0"/>
-                <a:ea typeface="新細明體" panose="02020500000000000000" pitchFamily="18" charset="-120"/>
-              </a:defRPr>
-            </a:lvl1pPr>
-            <a:lvl2pPr marL="742950" indent="-285750">
-              <a:defRPr kumimoji="1">
-                <a:solidFill>
-                  <a:schemeClr val="tx1"/>
-                </a:solidFill>
-                <a:latin typeface="Arial" panose="020B0604020202020204" pitchFamily="34" charset="0"/>
-                <a:ea typeface="新細明體" panose="02020500000000000000" pitchFamily="18" charset="-120"/>
-              </a:defRPr>
-            </a:lvl2pPr>
-            <a:lvl3pPr marL="1143000" indent="-228600">
-              <a:defRPr kumimoji="1">
-                <a:solidFill>
-                  <a:schemeClr val="tx1"/>
-                </a:solidFill>
-                <a:latin typeface="Arial" panose="020B0604020202020204" pitchFamily="34" charset="0"/>
-                <a:ea typeface="新細明體" panose="02020500000000000000" pitchFamily="18" charset="-120"/>
-              </a:defRPr>
-            </a:lvl3pPr>
-            <a:lvl4pPr marL="1600200" indent="-228600">
-              <a:defRPr kumimoji="1">
-                <a:solidFill>
-                  <a:schemeClr val="tx1"/>
-                </a:solidFill>
-                <a:latin typeface="Arial" panose="020B0604020202020204" pitchFamily="34" charset="0"/>
-                <a:ea typeface="新細明體" panose="02020500000000000000" pitchFamily="18" charset="-120"/>
-              </a:defRPr>
-            </a:lvl4pPr>
-            <a:lvl5pPr marL="2057400" indent="-228600">
-              <a:defRPr kumimoji="1">
-                <a:solidFill>
-                  <a:schemeClr val="tx1"/>
-                </a:solidFill>
-                <a:latin typeface="Arial" panose="020B0604020202020204" pitchFamily="34" charset="0"/>
-                <a:ea typeface="新細明體" panose="02020500000000000000" pitchFamily="18" charset="-120"/>
-              </a:defRPr>
-            </a:lvl5pPr>
-            <a:lvl6pPr marL="2514600" indent="-228600" eaLnBrk="0" fontAlgn="base" hangingPunct="0">
-              <a:spcBef>
-                <a:spcPct val="0"/>
-              </a:spcBef>
-              <a:spcAft>
-                <a:spcPct val="0"/>
-              </a:spcAft>
-              <a:defRPr kumimoji="1">
-                <a:solidFill>
-                  <a:schemeClr val="tx1"/>
-                </a:solidFill>
-                <a:latin typeface="Arial" panose="020B0604020202020204" pitchFamily="34" charset="0"/>
-                <a:ea typeface="新細明體" panose="02020500000000000000" pitchFamily="18" charset="-120"/>
-              </a:defRPr>
-            </a:lvl6pPr>
-            <a:lvl7pPr marL="2971800" indent="-228600" eaLnBrk="0" fontAlgn="base" hangingPunct="0">
-              <a:spcBef>
-                <a:spcPct val="0"/>
-              </a:spcBef>
-              <a:spcAft>
-                <a:spcPct val="0"/>
-              </a:spcAft>
-              <a:defRPr kumimoji="1">
-                <a:solidFill>
-                  <a:schemeClr val="tx1"/>
-                </a:solidFill>
-                <a:latin typeface="Arial" panose="020B0604020202020204" pitchFamily="34" charset="0"/>
-                <a:ea typeface="新細明體" panose="02020500000000000000" pitchFamily="18" charset="-120"/>
-              </a:defRPr>
-            </a:lvl7pPr>
-            <a:lvl8pPr marL="3429000" indent="-228600" eaLnBrk="0" fontAlgn="base" hangingPunct="0">
-              <a:spcBef>
-                <a:spcPct val="0"/>
-              </a:spcBef>
-              <a:spcAft>
-                <a:spcPct val="0"/>
-              </a:spcAft>
-              <a:defRPr kumimoji="1">
-                <a:solidFill>
-                  <a:schemeClr val="tx1"/>
-                </a:solidFill>
-                <a:latin typeface="Arial" panose="020B0604020202020204" pitchFamily="34" charset="0"/>
-                <a:ea typeface="新細明體" panose="02020500000000000000" pitchFamily="18" charset="-120"/>
-              </a:defRPr>
-            </a:lvl8pPr>
-            <a:lvl9pPr marL="3886200" indent="-228600" eaLnBrk="0" fontAlgn="base" hangingPunct="0">
-              <a:spcBef>
-                <a:spcPct val="0"/>
-              </a:spcBef>
-              <a:spcAft>
-                <a:spcPct val="0"/>
-              </a:spcAft>
-              <a:defRPr kumimoji="1">
-                <a:solidFill>
-                  <a:schemeClr val="tx1"/>
-                </a:solidFill>
-                <a:latin typeface="Arial" panose="020B0604020202020204" pitchFamily="34" charset="0"/>
-                <a:ea typeface="新細明體" panose="02020500000000000000" pitchFamily="18" charset="-120"/>
-              </a:defRPr>
-            </a:lvl9pPr>
-          </a:lstStyle>
-          <a:p>
-            <a:fld id="{EBE02C60-DB4E-114A-953C-5EAFB3A2DC91}" type="slidenum">
-              <a:rPr kumimoji="0" lang="en-US" altLang="zh-TW">
-                <a:latin typeface="Arial Black" panose="020B0604020202020204" pitchFamily="34" charset="0"/>
-              </a:rPr>
-              <a:pPr/>
-              <a:t>25</a:t>
-            </a:fld>
-            <a:endParaRPr kumimoji="0" lang="en-US" altLang="zh-TW">
-              <a:latin typeface="Arial Black" panose="020B0604020202020204" pitchFamily="34" charset="0"/>
-            </a:endParaRPr>
-          </a:p>
-        </p:txBody>
-      </p:sp>
-      <p:sp>
-        <p:nvSpPr>
-          <p:cNvPr id="15362" name="Rectangle 2">
-            <a:extLst>
-              <a:ext uri="{FF2B5EF4-FFF2-40B4-BE49-F238E27FC236}">
-                <a16:creationId xmlns:a16="http://schemas.microsoft.com/office/drawing/2014/main" id="{11687A1C-67C9-CD9B-4357-7D170CE6EEAD}"/>
-              </a:ext>
-            </a:extLst>
-          </p:cNvPr>
-          <p:cNvSpPr>
-            <a:spLocks noGrp="1" noChangeArrowheads="1"/>
-          </p:cNvSpPr>
-          <p:nvPr>
-            <p:ph type="title"/>
-          </p:nvPr>
-        </p:nvSpPr>
-        <p:spPr/>
-        <p:txBody>
-          <a:bodyPr/>
-          <a:lstStyle/>
-          <a:p>
-            <a:pPr eaLnBrk="1" hangingPunct="1"/>
-            <a:r>
-              <a:rPr lang="en-US" altLang="zh-TW" sz="3600" dirty="0"/>
-              <a:t>Within-Between Model(2)</a:t>
-            </a:r>
-            <a:endParaRPr lang="zh-TW" altLang="en-US" sz="3600" dirty="0"/>
-          </a:p>
-        </p:txBody>
-      </p:sp>
-      <p:sp>
-        <p:nvSpPr>
-          <p:cNvPr id="15363" name="Rectangle 3">
-            <a:extLst>
-              <a:ext uri="{FF2B5EF4-FFF2-40B4-BE49-F238E27FC236}">
-                <a16:creationId xmlns:a16="http://schemas.microsoft.com/office/drawing/2014/main" id="{6CB01DE3-D0B7-BCF1-47CE-4246E19CDB08}"/>
-              </a:ext>
-            </a:extLst>
-          </p:cNvPr>
-          <p:cNvSpPr>
-            <a:spLocks noGrp="1" noChangeArrowheads="1"/>
-          </p:cNvSpPr>
-          <p:nvPr>
-            <p:ph type="body" idx="1"/>
-          </p:nvPr>
-        </p:nvSpPr>
-        <p:spPr/>
-        <p:txBody>
-          <a:bodyPr/>
-          <a:lstStyle/>
-          <a:p>
-            <a:pPr eaLnBrk="1" hangingPunct="1">
-              <a:lnSpc>
-                <a:spcPct val="150000"/>
-              </a:lnSpc>
-              <a:buFont typeface="Arial" panose="020B0604020202020204" pitchFamily="34" charset="0"/>
-              <a:buChar char="•"/>
-            </a:pPr>
-            <a:r>
-              <a:rPr lang="en-US" altLang="zh-TW" sz="2000" dirty="0"/>
-              <a:t>Tsai and Tsai (2022)</a:t>
-            </a:r>
-            <a:r>
-              <a:rPr lang="zh-TW" altLang="en-US" sz="2000" dirty="0"/>
-              <a:t>利用</a:t>
-            </a:r>
-            <a:r>
-              <a:rPr lang="en-US" altLang="zh-TW" sz="2000" dirty="0"/>
-              <a:t>Within-between</a:t>
-            </a:r>
-            <a:r>
-              <a:rPr lang="zh-TW" altLang="en-US" sz="2000" dirty="0"/>
-              <a:t>模型分析兩波追蹤資料，發現認為經濟改善的民眾變得更支持獨立，認同蔡英文總統處理兩岸關係的民眾也變得更支持獨立。此外，政黨認同一直穩定影響統獨立場。</a:t>
-            </a:r>
-            <a:endParaRPr lang="en-US" altLang="zh-TW" sz="2000" dirty="0"/>
-          </a:p>
-          <a:p>
-            <a:pPr eaLnBrk="1" hangingPunct="1">
-              <a:lnSpc>
-                <a:spcPct val="150000"/>
-              </a:lnSpc>
-              <a:buFont typeface="Arial" panose="020B0604020202020204" pitchFamily="34" charset="0"/>
-              <a:buChar char="•"/>
-            </a:pPr>
-            <a:r>
-              <a:rPr lang="zh-TW" altLang="en-US" sz="2000" dirty="0"/>
-              <a:t>追蹤樣本過程中，難免會損失樣本，所以重點放在解釋樣本本身在兩個時間點之間的態度變化所造成的依變項的變化，而不是推論民眾的意見。前提是民眾常改變意見是隨機發生還是有原因的發生。</a:t>
-            </a:r>
-            <a:endParaRPr lang="en-US" altLang="zh-TW" sz="2000" dirty="0"/>
-          </a:p>
-          <a:p>
-            <a:pPr eaLnBrk="1" hangingPunct="1">
-              <a:lnSpc>
-                <a:spcPct val="150000"/>
-              </a:lnSpc>
-              <a:buFont typeface="Arial" panose="020B0604020202020204" pitchFamily="34" charset="0"/>
-              <a:buChar char="•"/>
-            </a:pPr>
-            <a:endParaRPr lang="en-US" altLang="zh-TW" sz="2000" dirty="0"/>
-          </a:p>
-          <a:p>
-            <a:pPr eaLnBrk="1" hangingPunct="1"/>
-            <a:endParaRPr lang="en-US" altLang="zh-TW" dirty="0"/>
-          </a:p>
-        </p:txBody>
-      </p:sp>
     </p:spTree>
     <p:extLst>
       <p:ext uri="{BB962C8B-B14F-4D97-AF65-F5344CB8AC3E}">
@@ -16808,14 +17019,51 @@
                 <a:latin typeface="Times New Roman" panose="02020603050405020304" pitchFamily="18" charset="0"/>
                 <a:cs typeface="Times New Roman" panose="02020603050405020304" pitchFamily="18" charset="0"/>
               </a:rPr>
-              <a:t>‘The rolling cross-section design’ Electoral </a:t>
-            </a:r>
-            <a:r>
-              <a:rPr kumimoji="1" lang="en-US" altLang="zh-TW" sz="2000">
+              <a:t>‘The rolling cross-section design’ Electoral Studies 21,2:283-295.</a:t>
+            </a:r>
+          </a:p>
+          <a:p>
+            <a:pPr>
+              <a:lnSpc>
+                <a:spcPct val="150000"/>
+              </a:lnSpc>
+              <a:buFont typeface="Courier New" panose="02070309020205020404" pitchFamily="49" charset="0"/>
+              <a:buChar char="o"/>
+            </a:pPr>
+            <a:r>
+              <a:rPr lang="en-US" altLang="zh-TW" sz="2000" dirty="0">
                 <a:latin typeface="Times New Roman" panose="02020603050405020304" pitchFamily="18" charset="0"/>
                 <a:cs typeface="Times New Roman" panose="02020603050405020304" pitchFamily="18" charset="0"/>
               </a:rPr>
-              <a:t>Studies 21,2:283-295.</a:t>
+              <a:t>Jos W. R. </a:t>
+            </a:r>
+            <a:r>
+              <a:rPr lang="en-US" altLang="zh-TW" sz="2000" dirty="0" err="1">
+                <a:latin typeface="Times New Roman" panose="02020603050405020304" pitchFamily="18" charset="0"/>
+                <a:cs typeface="Times New Roman" panose="02020603050405020304" pitchFamily="18" charset="0"/>
+              </a:rPr>
+              <a:t>Twisk</a:t>
+            </a:r>
+            <a:r>
+              <a:rPr lang="en-US" altLang="zh-TW" sz="2000" dirty="0">
+                <a:latin typeface="Times New Roman" panose="02020603050405020304" pitchFamily="18" charset="0"/>
+                <a:cs typeface="Times New Roman" panose="02020603050405020304" pitchFamily="18" charset="0"/>
+              </a:rPr>
+              <a:t>. 2023. “Models to disentangle the between-and-within-subjects relationship” in </a:t>
+            </a:r>
+            <a:r>
+              <a:rPr lang="en-US" altLang="zh-TW" sz="2000" i="1" dirty="0">
+                <a:latin typeface="Times New Roman" panose="02020603050405020304" pitchFamily="18" charset="0"/>
+                <a:cs typeface="Times New Roman" panose="02020603050405020304" pitchFamily="18" charset="0"/>
+              </a:rPr>
+              <a:t>Applied Longitudinal Data Analysis for Medical Science</a:t>
+            </a:r>
+            <a:r>
+              <a:rPr lang="en-US" altLang="zh-TW" sz="2000" dirty="0">
+                <a:latin typeface="Times New Roman" panose="02020603050405020304" pitchFamily="18" charset="0"/>
+                <a:cs typeface="Times New Roman" panose="02020603050405020304" pitchFamily="18" charset="0"/>
+              </a:rPr>
+              <a:t>.</a:t>
             </a:r>
             <a:endParaRPr kumimoji="1" lang="en-US" altLang="zh-TW" sz="2000" dirty="0">
               <a:latin typeface="Times New Roman" panose="02020603050405020304" pitchFamily="18" charset="0"/>
